--- a/3年山本先生/05_コリジョンのライブラリ.pptx
+++ b/3年山本先生/05_コリジョンのライブラリ.pptx
@@ -266,7 +266,7 @@
               <a:pPr>
                 <a:defRPr/>
               </a:pPr>
-              <a:t>2023/11/16</a:t>
+              <a:t>2026/5/11</a:t>
             </a:fld>
             <a:endParaRPr lang="ja-JP" altLang="en-US"/>
           </a:p>
